--- a/public/fun/pack/pptx/newspro/카드뉴스프리미엄_14_감사·칭찬_네이비샴페인.pptx
+++ b/public/fun/pack/pptx/newspro/카드뉴스프리미엄_14_감사·칭찬_네이비샴페인.pptx
@@ -113,12 +113,12 @@
   <p:extLst>
     <p:ext uri="{521415D9-36F7-43E2-AB2F-B90AF26B5E84}">
       <p14:sectionLst xmlns:p14="http://schemas.microsoft.com/office/powerpoint/2010/main">
-        <p14:section name="시작" id="{E92450BD-136F-4AF4-9EA3-5DC92DDB433E}">
+        <p14:section name="시작" id="{F8942AF2-CA5D-4057-A2CE-CD2E4F00ED18}">
           <p14:sldIdLst>
             <p14:sldId id="256"/>
           </p14:sldIdLst>
         </p14:section>
-        <p14:section name="본문" id="{7468AEA0-FC68-437C-BBE9-C795F9B13A8D}">
+        <p14:section name="본문" id="{94D80A80-CDFA-44F4-831C-2E695A0DD7A9}">
           <p14:sldIdLst>
             <p14:sldId id="257"/>
             <p14:sldId id="258"/>
@@ -127,7 +127,7 @@
             <p14:sldId id="261"/>
           </p14:sldIdLst>
         </p14:section>
-        <p14:section name="마무리" id="{7D33F039-CD6D-4772-A902-D51148B05A0F}">
+        <p14:section name="마무리" id="{45FAA05C-2D3B-468A-87B9-3D43D8BE9755}">
           <p14:sldIdLst>
             <p14:sldId id="262"/>
           </p14:sldIdLst>
@@ -1506,7 +1506,7 @@
             </a:lvl1pPr>
           </a:lstStyle>
           <a:p>
-            <a:fld id="{0CB8D178-2D81-4F97-B355-EA7743F697C0}" type="slidenum">
+            <a:fld id="{C87BD920-D99A-4AA7-AE9E-DB01EA1EE11B}" type="slidenum">
               <a:rPr lang="en-US"/>
               <a:t>‹#›</a:t>
             </a:fld>
@@ -2225,7 +2225,7 @@
             </a:lvl1pPr>
           </a:lstStyle>
           <a:p>
-            <a:fld id="{CB9D146F-BD4E-4216-95E2-CAB2F76D1E34}" type="slidenum">
+            <a:fld id="{A4E1E972-40A6-49CB-9FC5-10B561664BB7}" type="slidenum">
               <a:rPr lang="en-US"/>
               <a:t>‹#›</a:t>
             </a:fld>
@@ -2978,7 +2978,7 @@
             </a:lvl1pPr>
           </a:lstStyle>
           <a:p>
-            <a:fld id="{985932C4-00EC-4318-998B-A73DDF4A7952}" type="slidenum">
+            <a:fld id="{7A4C39D2-2658-4BBA-8D59-8ED873471541}" type="slidenum">
               <a:rPr lang="en-US"/>
               <a:t>‹#›</a:t>
             </a:fld>
@@ -4040,7 +4040,7 @@
           <a:bodyPr/>
           <a:lstStyle/>
           <a:p>
-            <a:fld id="{FE7AEF77-CDB3-4B22-B8F9-DA2BD1AB7D35}" type="slidenum">
+            <a:fld id="{7537C9AA-6F46-4C89-8824-4EFCCCCCE6A9}" type="slidenum">
               <a:rPr lang="en-US"/>
               <a:t>‹#›</a:t>
             </a:fld>
@@ -4206,7 +4206,7 @@
           <a:bodyPr/>
           <a:lstStyle/>
           <a:p>
-            <a:fld id="{09574A8A-2355-44CF-9E88-C93373D92FC0}" type="slidenum">
+            <a:fld id="{5314650C-5182-449C-B085-83B7B8CE164B}" type="slidenum">
               <a:rPr lang="en-US"/>
               <a:t>‹#›</a:t>
             </a:fld>
@@ -4372,7 +4372,7 @@
           <a:bodyPr/>
           <a:lstStyle/>
           <a:p>
-            <a:fld id="{4DE58EE5-14C5-433E-8539-839BFFC46080}" type="slidenum">
+            <a:fld id="{9F9388FD-1BF1-41CD-A4B9-736160EEEDEF}" type="slidenum">
               <a:rPr lang="en-US"/>
               <a:t>‹#›</a:t>
             </a:fld>
@@ -4538,7 +4538,7 @@
           <a:bodyPr/>
           <a:lstStyle/>
           <a:p>
-            <a:fld id="{C201EA6D-A7F3-4087-B421-BD9454EDD460}" type="slidenum">
+            <a:fld id="{D90D7EF0-37AE-4BB9-9D15-6A413E5CEB55}" type="slidenum">
               <a:rPr lang="en-US"/>
               <a:t>‹#›</a:t>
             </a:fld>
@@ -4704,7 +4704,7 @@
           <a:bodyPr/>
           <a:lstStyle/>
           <a:p>
-            <a:fld id="{4C88A91F-E534-42A5-9892-42B90E8B292D}" type="slidenum">
+            <a:fld id="{6B32D212-3B6F-4278-B50B-F4329F044784}" type="slidenum">
               <a:rPr lang="en-US"/>
               <a:t>‹#›</a:t>
             </a:fld>
